--- a/Диплом.pptx
+++ b/Диплом.pptx
@@ -6,7 +6,7 @@
     <p:sldMasterId id="2147483698" r:id="rId2"/>
   </p:sldMasterIdLst>
   <p:notesMasterIdLst>
-    <p:notesMasterId r:id="rId13"/>
+    <p:notesMasterId r:id="rId17"/>
   </p:notesMasterIdLst>
   <p:sldIdLst>
     <p:sldId id="258" r:id="rId3"/>
@@ -15,20 +15,24 @@
     <p:sldId id="285" r:id="rId6"/>
     <p:sldId id="286" r:id="rId7"/>
     <p:sldId id="287" r:id="rId8"/>
-    <p:sldId id="288" r:id="rId9"/>
-    <p:sldId id="289" r:id="rId10"/>
-    <p:sldId id="290" r:id="rId11"/>
-    <p:sldId id="291" r:id="rId12"/>
+    <p:sldId id="292" r:id="rId9"/>
+    <p:sldId id="288" r:id="rId10"/>
+    <p:sldId id="289" r:id="rId11"/>
+    <p:sldId id="293" r:id="rId12"/>
+    <p:sldId id="294" r:id="rId13"/>
+    <p:sldId id="295" r:id="rId14"/>
+    <p:sldId id="290" r:id="rId15"/>
+    <p:sldId id="291" r:id="rId16"/>
   </p:sldIdLst>
   <p:sldSz cx="12192000" cy="6858000"/>
   <p:notesSz cx="6858000" cy="9144000"/>
   <p:embeddedFontLst>
     <p:embeddedFont>
       <p:font typeface="Montserrat" panose="00000500000000000000" pitchFamily="2" charset="0"/>
-      <p:regular r:id="rId14"/>
-      <p:bold r:id="rId15"/>
-      <p:italic r:id="rId16"/>
-      <p:boldItalic r:id="rId17"/>
+      <p:regular r:id="rId18"/>
+      <p:bold r:id="rId19"/>
+      <p:italic r:id="rId20"/>
+      <p:boldItalic r:id="rId21"/>
     </p:embeddedFont>
   </p:embeddedFontLst>
   <p:defaultTextStyle>
@@ -227,7 +231,7 @@
           <a:p>
             <a:fld id="{C71A4F82-DAF8-4DB7-B5B2-598342E61993}" type="datetimeFigureOut">
               <a:rPr lang="ru-RU" smtClean="0"/>
-              <a:t>07.06.2026</a:t>
+              <a:t>16.06.2026</a:t>
             </a:fld>
             <a:endParaRPr lang="ru-RU"/>
           </a:p>
@@ -1014,7 +1018,7 @@
           <a:p>
             <a:fld id="{C764DE79-268F-4C1A-8933-263129D2AF90}" type="datetimeFigureOut">
               <a:rPr lang="en-US" smtClean="0"/>
-              <a:t>6/7/2026</a:t>
+              <a:t>6/16/2026</a:t>
             </a:fld>
             <a:endParaRPr lang="en-US" dirty="0"/>
           </a:p>
@@ -1261,7 +1265,7 @@
           <a:p>
             <a:fld id="{C764DE79-268F-4C1A-8933-263129D2AF90}" type="datetimeFigureOut">
               <a:rPr lang="en-US" smtClean="0"/>
-              <a:t>6/7/2026</a:t>
+              <a:t>6/16/2026</a:t>
             </a:fld>
             <a:endParaRPr lang="en-US" dirty="0"/>
           </a:p>
@@ -1494,7 +1498,7 @@
           <a:p>
             <a:fld id="{C764DE79-268F-4C1A-8933-263129D2AF90}" type="datetimeFigureOut">
               <a:rPr lang="en-US" smtClean="0"/>
-              <a:t>6/7/2026</a:t>
+              <a:t>6/16/2026</a:t>
             </a:fld>
             <a:endParaRPr lang="en-US" dirty="0"/>
           </a:p>
@@ -1862,7 +1866,7 @@
           <a:p>
             <a:fld id="{C764DE79-268F-4C1A-8933-263129D2AF90}" type="datetimeFigureOut">
               <a:rPr lang="en-US" smtClean="0"/>
-              <a:t>6/7/2026</a:t>
+              <a:t>6/16/2026</a:t>
             </a:fld>
             <a:endParaRPr lang="en-US" dirty="0"/>
           </a:p>
@@ -1981,7 +1985,7 @@
           <a:p>
             <a:fld id="{C764DE79-268F-4C1A-8933-263129D2AF90}" type="datetimeFigureOut">
               <a:rPr lang="en-US" smtClean="0"/>
-              <a:t>6/7/2026</a:t>
+              <a:t>6/16/2026</a:t>
             </a:fld>
             <a:endParaRPr lang="en-US" dirty="0"/>
           </a:p>
@@ -2077,7 +2081,7 @@
           <a:p>
             <a:fld id="{C764DE79-268F-4C1A-8933-263129D2AF90}" type="datetimeFigureOut">
               <a:rPr lang="en-US" smtClean="0"/>
-              <a:t>6/7/2026</a:t>
+              <a:t>6/16/2026</a:t>
             </a:fld>
             <a:endParaRPr lang="en-US" dirty="0"/>
           </a:p>
@@ -2355,7 +2359,7 @@
           <a:p>
             <a:fld id="{C764DE79-268F-4C1A-8933-263129D2AF90}" type="datetimeFigureOut">
               <a:rPr lang="en-US" smtClean="0"/>
-              <a:t>6/7/2026</a:t>
+              <a:t>6/16/2026</a:t>
             </a:fld>
             <a:endParaRPr lang="en-US" dirty="0"/>
           </a:p>
@@ -2613,7 +2617,7 @@
           <a:p>
             <a:fld id="{C764DE79-268F-4C1A-8933-263129D2AF90}" type="datetimeFigureOut">
               <a:rPr lang="en-US" smtClean="0"/>
-              <a:t>6/7/2026</a:t>
+              <a:t>6/16/2026</a:t>
             </a:fld>
             <a:endParaRPr lang="en-US" dirty="0"/>
           </a:p>
@@ -2784,7 +2788,7 @@
           <a:p>
             <a:fld id="{C764DE79-268F-4C1A-8933-263129D2AF90}" type="datetimeFigureOut">
               <a:rPr lang="en-US" smtClean="0"/>
-              <a:t>6/7/2026</a:t>
+              <a:t>6/16/2026</a:t>
             </a:fld>
             <a:endParaRPr lang="en-US" dirty="0"/>
           </a:p>
@@ -2965,7 +2969,7 @@
           <a:p>
             <a:fld id="{C764DE79-268F-4C1A-8933-263129D2AF90}" type="datetimeFigureOut">
               <a:rPr lang="en-US" smtClean="0"/>
-              <a:t>6/7/2026</a:t>
+              <a:t>6/16/2026</a:t>
             </a:fld>
             <a:endParaRPr lang="en-US" dirty="0"/>
           </a:p>
@@ -5939,7 +5943,7 @@
           <a:p>
             <a:fld id="{C764DE79-268F-4C1A-8933-263129D2AF90}" type="datetimeFigureOut">
               <a:rPr lang="en-US" smtClean="0"/>
-              <a:t>6/7/2026</a:t>
+              <a:t>6/16/2026</a:t>
             </a:fld>
             <a:endParaRPr lang="en-US" dirty="0"/>
           </a:p>
@@ -6513,7 +6517,7 @@
           <a:p>
             <a:fld id="{C764DE79-268F-4C1A-8933-263129D2AF90}" type="datetimeFigureOut">
               <a:rPr lang="en-US" dirty="0"/>
-              <a:t>6/7/2026</a:t>
+              <a:t>6/16/2026</a:t>
             </a:fld>
             <a:endParaRPr lang="en-US" dirty="0"/>
           </a:p>
@@ -7306,6 +7310,754 @@
 </file>
 
 <file path=ppt/slides/slide10.xml><?xml version="1.0" encoding="utf-8"?>
+<p:sld xmlns:a="http://schemas.openxmlformats.org/drawingml/2006/main" xmlns:r="http://schemas.openxmlformats.org/officeDocument/2006/relationships" xmlns:p="http://schemas.openxmlformats.org/presentationml/2006/main">
+  <p:cSld>
+    <p:spTree>
+      <p:nvGrpSpPr>
+        <p:cNvPr id="1" name=""/>
+        <p:cNvGrpSpPr/>
+        <p:nvPr/>
+      </p:nvGrpSpPr>
+      <p:grpSpPr>
+        <a:xfrm>
+          <a:off x="0" y="0"/>
+          <a:ext cx="0" cy="0"/>
+          <a:chOff x="0" y="0"/>
+          <a:chExt cx="0" cy="0"/>
+        </a:xfrm>
+      </p:grpSpPr>
+      <p:sp>
+        <p:nvSpPr>
+          <p:cNvPr id="2" name="Заголовок 1">
+            <a:extLst>
+              <a:ext uri="{FF2B5EF4-FFF2-40B4-BE49-F238E27FC236}">
+                <a16:creationId xmlns:a16="http://schemas.microsoft.com/office/drawing/2014/main" id="{37F0DD0D-C1FA-D4A4-1BF5-C2CEF931371A}"/>
+              </a:ext>
+            </a:extLst>
+          </p:cNvPr>
+          <p:cNvSpPr>
+            <a:spLocks noGrp="1"/>
+          </p:cNvSpPr>
+          <p:nvPr>
+            <p:ph type="title"/>
+          </p:nvPr>
+        </p:nvSpPr>
+        <p:spPr/>
+        <p:txBody>
+          <a:bodyPr/>
+          <a:lstStyle/>
+          <a:p>
+            <a:r>
+              <a:rPr lang="ru-RU" dirty="0"/>
+              <a:t>Пользовательский интерфейс</a:t>
+            </a:r>
+            <a:r>
+              <a:rPr lang="en-US" dirty="0"/>
+              <a:t>:</a:t>
+            </a:r>
+            <a:r>
+              <a:rPr lang="ru-RU" dirty="0"/>
+              <a:t> модуль «документы»</a:t>
+            </a:r>
+          </a:p>
+        </p:txBody>
+      </p:sp>
+      <p:sp>
+        <p:nvSpPr>
+          <p:cNvPr id="3" name="Текст 2">
+            <a:extLst>
+              <a:ext uri="{FF2B5EF4-FFF2-40B4-BE49-F238E27FC236}">
+                <a16:creationId xmlns:a16="http://schemas.microsoft.com/office/drawing/2014/main" id="{AF3ECB33-54D5-B5D0-3D8B-014185543B84}"/>
+              </a:ext>
+            </a:extLst>
+          </p:cNvPr>
+          <p:cNvSpPr>
+            <a:spLocks noGrp="1"/>
+          </p:cNvSpPr>
+          <p:nvPr>
+            <p:ph type="body" sz="quarter" idx="10"/>
+          </p:nvPr>
+        </p:nvSpPr>
+        <p:spPr/>
+        <p:txBody>
+          <a:bodyPr/>
+          <a:lstStyle/>
+          <a:p>
+            <a:endParaRPr lang="ru-RU"/>
+          </a:p>
+        </p:txBody>
+      </p:sp>
+      <p:sp>
+        <p:nvSpPr>
+          <p:cNvPr id="4" name="Текст 3">
+            <a:extLst>
+              <a:ext uri="{FF2B5EF4-FFF2-40B4-BE49-F238E27FC236}">
+                <a16:creationId xmlns:a16="http://schemas.microsoft.com/office/drawing/2014/main" id="{DEBD4708-0DB1-B145-B31F-49478C32957C}"/>
+              </a:ext>
+            </a:extLst>
+          </p:cNvPr>
+          <p:cNvSpPr>
+            <a:spLocks noGrp="1"/>
+          </p:cNvSpPr>
+          <p:nvPr>
+            <p:ph type="body" sz="quarter" idx="11"/>
+          </p:nvPr>
+        </p:nvSpPr>
+        <p:spPr/>
+        <p:txBody>
+          <a:bodyPr/>
+          <a:lstStyle/>
+          <a:p>
+            <a:endParaRPr lang="ru-RU"/>
+          </a:p>
+        </p:txBody>
+      </p:sp>
+      <p:pic>
+        <p:nvPicPr>
+          <p:cNvPr id="6" name="Рисунок 5">
+            <a:extLst>
+              <a:ext uri="{FF2B5EF4-FFF2-40B4-BE49-F238E27FC236}">
+                <a16:creationId xmlns:a16="http://schemas.microsoft.com/office/drawing/2014/main" id="{0E751E35-C868-C45F-988B-88F4F3886138}"/>
+              </a:ext>
+            </a:extLst>
+          </p:cNvPr>
+          <p:cNvPicPr>
+            <a:picLocks noChangeAspect="1"/>
+          </p:cNvPicPr>
+          <p:nvPr/>
+        </p:nvPicPr>
+        <p:blipFill>
+          <a:blip r:embed="rId2"/>
+          <a:stretch>
+            <a:fillRect/>
+          </a:stretch>
+        </p:blipFill>
+        <p:spPr>
+          <a:xfrm>
+            <a:off x="1233797" y="1393794"/>
+            <a:ext cx="9685259" cy="4932220"/>
+          </a:xfrm>
+          <a:prstGeom prst="rect">
+            <a:avLst/>
+          </a:prstGeom>
+        </p:spPr>
+      </p:pic>
+    </p:spTree>
+    <p:extLst>
+      <p:ext uri="{BB962C8B-B14F-4D97-AF65-F5344CB8AC3E}">
+        <p14:creationId xmlns:p14="http://schemas.microsoft.com/office/powerpoint/2010/main" val="2834679472"/>
+      </p:ext>
+    </p:extLst>
+  </p:cSld>
+  <p:clrMapOvr>
+    <a:masterClrMapping/>
+  </p:clrMapOvr>
+</p:sld>
+</file>
+
+<file path=ppt/slides/slide11.xml><?xml version="1.0" encoding="utf-8"?>
+<p:sld xmlns:a="http://schemas.openxmlformats.org/drawingml/2006/main" xmlns:r="http://schemas.openxmlformats.org/officeDocument/2006/relationships" xmlns:p="http://schemas.openxmlformats.org/presentationml/2006/main">
+  <p:cSld>
+    <p:spTree>
+      <p:nvGrpSpPr>
+        <p:cNvPr id="1" name=""/>
+        <p:cNvGrpSpPr/>
+        <p:nvPr/>
+      </p:nvGrpSpPr>
+      <p:grpSpPr>
+        <a:xfrm>
+          <a:off x="0" y="0"/>
+          <a:ext cx="0" cy="0"/>
+          <a:chOff x="0" y="0"/>
+          <a:chExt cx="0" cy="0"/>
+        </a:xfrm>
+      </p:grpSpPr>
+      <p:sp>
+        <p:nvSpPr>
+          <p:cNvPr id="2" name="Заголовок 1">
+            <a:extLst>
+              <a:ext uri="{FF2B5EF4-FFF2-40B4-BE49-F238E27FC236}">
+                <a16:creationId xmlns:a16="http://schemas.microsoft.com/office/drawing/2014/main" id="{4AD20ACA-4CCB-45C7-E508-78395716DBF9}"/>
+              </a:ext>
+            </a:extLst>
+          </p:cNvPr>
+          <p:cNvSpPr>
+            <a:spLocks noGrp="1"/>
+          </p:cNvSpPr>
+          <p:nvPr>
+            <p:ph type="title"/>
+          </p:nvPr>
+        </p:nvSpPr>
+        <p:spPr/>
+        <p:txBody>
+          <a:bodyPr/>
+          <a:lstStyle/>
+          <a:p>
+            <a:r>
+              <a:rPr lang="ru-RU" dirty="0"/>
+              <a:t>Пользовательский интерфейс</a:t>
+            </a:r>
+            <a:r>
+              <a:rPr lang="en-US" dirty="0"/>
+              <a:t>:</a:t>
+            </a:r>
+            <a:r>
+              <a:rPr lang="ru-RU" dirty="0"/>
+              <a:t> панель инструментов</a:t>
+            </a:r>
+          </a:p>
+        </p:txBody>
+      </p:sp>
+      <p:sp>
+        <p:nvSpPr>
+          <p:cNvPr id="3" name="Текст 2">
+            <a:extLst>
+              <a:ext uri="{FF2B5EF4-FFF2-40B4-BE49-F238E27FC236}">
+                <a16:creationId xmlns:a16="http://schemas.microsoft.com/office/drawing/2014/main" id="{B742793F-4EB9-951F-7A80-8A16DE02B34C}"/>
+              </a:ext>
+            </a:extLst>
+          </p:cNvPr>
+          <p:cNvSpPr>
+            <a:spLocks noGrp="1"/>
+          </p:cNvSpPr>
+          <p:nvPr>
+            <p:ph type="body" sz="quarter" idx="10"/>
+          </p:nvPr>
+        </p:nvSpPr>
+        <p:spPr/>
+        <p:txBody>
+          <a:bodyPr/>
+          <a:lstStyle/>
+          <a:p>
+            <a:endParaRPr lang="ru-RU"/>
+          </a:p>
+        </p:txBody>
+      </p:sp>
+      <p:sp>
+        <p:nvSpPr>
+          <p:cNvPr id="4" name="Текст 3">
+            <a:extLst>
+              <a:ext uri="{FF2B5EF4-FFF2-40B4-BE49-F238E27FC236}">
+                <a16:creationId xmlns:a16="http://schemas.microsoft.com/office/drawing/2014/main" id="{239360A7-04A2-1E15-DF93-20A486C4C825}"/>
+              </a:ext>
+            </a:extLst>
+          </p:cNvPr>
+          <p:cNvSpPr>
+            <a:spLocks noGrp="1"/>
+          </p:cNvSpPr>
+          <p:nvPr>
+            <p:ph type="body" sz="quarter" idx="11"/>
+          </p:nvPr>
+        </p:nvSpPr>
+        <p:spPr/>
+        <p:txBody>
+          <a:bodyPr/>
+          <a:lstStyle/>
+          <a:p>
+            <a:endParaRPr lang="ru-RU"/>
+          </a:p>
+        </p:txBody>
+      </p:sp>
+      <p:pic>
+        <p:nvPicPr>
+          <p:cNvPr id="8" name="Рисунок 7">
+            <a:extLst>
+              <a:ext uri="{FF2B5EF4-FFF2-40B4-BE49-F238E27FC236}">
+                <a16:creationId xmlns:a16="http://schemas.microsoft.com/office/drawing/2014/main" id="{7F0858E6-1A1B-8DC2-3A3D-1FFC9547160B}"/>
+              </a:ext>
+            </a:extLst>
+          </p:cNvPr>
+          <p:cNvPicPr>
+            <a:picLocks noChangeAspect="1"/>
+          </p:cNvPicPr>
+          <p:nvPr/>
+        </p:nvPicPr>
+        <p:blipFill>
+          <a:blip r:embed="rId2"/>
+          <a:stretch>
+            <a:fillRect/>
+          </a:stretch>
+        </p:blipFill>
+        <p:spPr>
+          <a:xfrm>
+            <a:off x="510466" y="3024801"/>
+            <a:ext cx="11171068" cy="863618"/>
+          </a:xfrm>
+          <a:prstGeom prst="rect">
+            <a:avLst/>
+          </a:prstGeom>
+        </p:spPr>
+      </p:pic>
+    </p:spTree>
+    <p:extLst>
+      <p:ext uri="{BB962C8B-B14F-4D97-AF65-F5344CB8AC3E}">
+        <p14:creationId xmlns:p14="http://schemas.microsoft.com/office/powerpoint/2010/main" val="3619652846"/>
+      </p:ext>
+    </p:extLst>
+  </p:cSld>
+  <p:clrMapOvr>
+    <a:masterClrMapping/>
+  </p:clrMapOvr>
+</p:sld>
+</file>
+
+<file path=ppt/slides/slide12.xml><?xml version="1.0" encoding="utf-8"?>
+<p:sld xmlns:a="http://schemas.openxmlformats.org/drawingml/2006/main" xmlns:r="http://schemas.openxmlformats.org/officeDocument/2006/relationships" xmlns:p="http://schemas.openxmlformats.org/presentationml/2006/main">
+  <p:cSld>
+    <p:spTree>
+      <p:nvGrpSpPr>
+        <p:cNvPr id="1" name=""/>
+        <p:cNvGrpSpPr/>
+        <p:nvPr/>
+      </p:nvGrpSpPr>
+      <p:grpSpPr>
+        <a:xfrm>
+          <a:off x="0" y="0"/>
+          <a:ext cx="0" cy="0"/>
+          <a:chOff x="0" y="0"/>
+          <a:chExt cx="0" cy="0"/>
+        </a:xfrm>
+      </p:grpSpPr>
+      <p:sp>
+        <p:nvSpPr>
+          <p:cNvPr id="2" name="Заголовок 1">
+            <a:extLst>
+              <a:ext uri="{FF2B5EF4-FFF2-40B4-BE49-F238E27FC236}">
+                <a16:creationId xmlns:a16="http://schemas.microsoft.com/office/drawing/2014/main" id="{CD3F53BE-DCCC-A0DB-F25F-FF9C2514A837}"/>
+              </a:ext>
+            </a:extLst>
+          </p:cNvPr>
+          <p:cNvSpPr>
+            <a:spLocks noGrp="1"/>
+          </p:cNvSpPr>
+          <p:nvPr>
+            <p:ph type="title"/>
+          </p:nvPr>
+        </p:nvSpPr>
+        <p:spPr/>
+        <p:txBody>
+          <a:bodyPr/>
+          <a:lstStyle/>
+          <a:p>
+            <a:r>
+              <a:rPr lang="ru-RU" dirty="0"/>
+              <a:t>Пользовательский интерфейс</a:t>
+            </a:r>
+            <a:r>
+              <a:rPr lang="en-US" dirty="0"/>
+              <a:t>:</a:t>
+            </a:r>
+            <a:r>
+              <a:rPr lang="ru-RU" dirty="0"/>
+              <a:t> копии документа</a:t>
+            </a:r>
+          </a:p>
+        </p:txBody>
+      </p:sp>
+      <p:sp>
+        <p:nvSpPr>
+          <p:cNvPr id="3" name="Текст 2">
+            <a:extLst>
+              <a:ext uri="{FF2B5EF4-FFF2-40B4-BE49-F238E27FC236}">
+                <a16:creationId xmlns:a16="http://schemas.microsoft.com/office/drawing/2014/main" id="{22252929-9577-BAD0-6A01-28E2008C9DD3}"/>
+              </a:ext>
+            </a:extLst>
+          </p:cNvPr>
+          <p:cNvSpPr>
+            <a:spLocks noGrp="1"/>
+          </p:cNvSpPr>
+          <p:nvPr>
+            <p:ph type="body" sz="quarter" idx="10"/>
+          </p:nvPr>
+        </p:nvSpPr>
+        <p:spPr/>
+        <p:txBody>
+          <a:bodyPr/>
+          <a:lstStyle/>
+          <a:p>
+            <a:endParaRPr lang="ru-RU"/>
+          </a:p>
+        </p:txBody>
+      </p:sp>
+      <p:sp>
+        <p:nvSpPr>
+          <p:cNvPr id="4" name="Текст 3">
+            <a:extLst>
+              <a:ext uri="{FF2B5EF4-FFF2-40B4-BE49-F238E27FC236}">
+                <a16:creationId xmlns:a16="http://schemas.microsoft.com/office/drawing/2014/main" id="{8C1332CE-5E14-AD69-5E13-4186AFD3CDE6}"/>
+              </a:ext>
+            </a:extLst>
+          </p:cNvPr>
+          <p:cNvSpPr>
+            <a:spLocks noGrp="1"/>
+          </p:cNvSpPr>
+          <p:nvPr>
+            <p:ph type="body" sz="quarter" idx="11"/>
+          </p:nvPr>
+        </p:nvSpPr>
+        <p:spPr/>
+        <p:txBody>
+          <a:bodyPr/>
+          <a:lstStyle/>
+          <a:p>
+            <a:endParaRPr lang="ru-RU"/>
+          </a:p>
+        </p:txBody>
+      </p:sp>
+      <p:pic>
+        <p:nvPicPr>
+          <p:cNvPr id="6" name="Рисунок 5">
+            <a:extLst>
+              <a:ext uri="{FF2B5EF4-FFF2-40B4-BE49-F238E27FC236}">
+                <a16:creationId xmlns:a16="http://schemas.microsoft.com/office/drawing/2014/main" id="{9DC81F72-6593-A0C2-8246-A43A10842E2A}"/>
+              </a:ext>
+            </a:extLst>
+          </p:cNvPr>
+          <p:cNvPicPr>
+            <a:picLocks noChangeAspect="1"/>
+          </p:cNvPicPr>
+          <p:nvPr/>
+        </p:nvPicPr>
+        <p:blipFill>
+          <a:blip r:embed="rId2"/>
+          <a:stretch>
+            <a:fillRect/>
+          </a:stretch>
+        </p:blipFill>
+        <p:spPr>
+          <a:xfrm>
+            <a:off x="4481396" y="1477665"/>
+            <a:ext cx="3229207" cy="4710759"/>
+          </a:xfrm>
+          <a:prstGeom prst="rect">
+            <a:avLst/>
+          </a:prstGeom>
+        </p:spPr>
+      </p:pic>
+    </p:spTree>
+    <p:extLst>
+      <p:ext uri="{BB962C8B-B14F-4D97-AF65-F5344CB8AC3E}">
+        <p14:creationId xmlns:p14="http://schemas.microsoft.com/office/powerpoint/2010/main" val="2203492683"/>
+      </p:ext>
+    </p:extLst>
+  </p:cSld>
+  <p:clrMapOvr>
+    <a:masterClrMapping/>
+  </p:clrMapOvr>
+</p:sld>
+</file>
+
+<file path=ppt/slides/slide13.xml><?xml version="1.0" encoding="utf-8"?>
+<p:sld xmlns:a="http://schemas.openxmlformats.org/drawingml/2006/main" xmlns:r="http://schemas.openxmlformats.org/officeDocument/2006/relationships" xmlns:p="http://schemas.openxmlformats.org/presentationml/2006/main">
+  <p:cSld>
+    <p:spTree>
+      <p:nvGrpSpPr>
+        <p:cNvPr id="1" name=""/>
+        <p:cNvGrpSpPr/>
+        <p:nvPr/>
+      </p:nvGrpSpPr>
+      <p:grpSpPr>
+        <a:xfrm>
+          <a:off x="0" y="0"/>
+          <a:ext cx="0" cy="0"/>
+          <a:chOff x="0" y="0"/>
+          <a:chExt cx="0" cy="0"/>
+        </a:xfrm>
+      </p:grpSpPr>
+      <p:sp>
+        <p:nvSpPr>
+          <p:cNvPr id="2" name="Заголовок 1">
+            <a:extLst>
+              <a:ext uri="{FF2B5EF4-FFF2-40B4-BE49-F238E27FC236}">
+                <a16:creationId xmlns:a16="http://schemas.microsoft.com/office/drawing/2014/main" id="{EEF8EAAE-71C6-352A-F486-42173F10E51C}"/>
+              </a:ext>
+            </a:extLst>
+          </p:cNvPr>
+          <p:cNvSpPr>
+            <a:spLocks noGrp="1"/>
+          </p:cNvSpPr>
+          <p:nvPr>
+            <p:ph type="title"/>
+          </p:nvPr>
+        </p:nvSpPr>
+        <p:spPr>
+          <a:xfrm>
+            <a:off x="559574" y="251379"/>
+            <a:ext cx="9173513" cy="738664"/>
+          </a:xfrm>
+        </p:spPr>
+        <p:txBody>
+          <a:bodyPr/>
+          <a:lstStyle/>
+          <a:p>
+            <a:r>
+              <a:rPr lang="ru-RU" dirty="0"/>
+              <a:t>Результаты и выводы</a:t>
+            </a:r>
+            <a:br>
+              <a:rPr lang="ru-RU" dirty="0"/>
+            </a:br>
+            <a:endParaRPr lang="ru-RU" dirty="0"/>
+          </a:p>
+        </p:txBody>
+      </p:sp>
+      <p:sp>
+        <p:nvSpPr>
+          <p:cNvPr id="3" name="Текст 2">
+            <a:extLst>
+              <a:ext uri="{FF2B5EF4-FFF2-40B4-BE49-F238E27FC236}">
+                <a16:creationId xmlns:a16="http://schemas.microsoft.com/office/drawing/2014/main" id="{5A7B9793-DA87-8E17-D127-62B1E17C47B5}"/>
+              </a:ext>
+            </a:extLst>
+          </p:cNvPr>
+          <p:cNvSpPr>
+            <a:spLocks noGrp="1"/>
+          </p:cNvSpPr>
+          <p:nvPr>
+            <p:ph type="body" sz="quarter" idx="10"/>
+          </p:nvPr>
+        </p:nvSpPr>
+        <p:spPr>
+          <a:xfrm>
+            <a:off x="559574" y="1729295"/>
+            <a:ext cx="9063820" cy="4924425"/>
+          </a:xfrm>
+        </p:spPr>
+        <p:txBody>
+          <a:bodyPr/>
+          <a:lstStyle/>
+          <a:p>
+            <a:r>
+              <a:rPr lang="ru-RU" sz="2000" dirty="0"/>
+              <a:t>Результаты работы:</a:t>
+            </a:r>
+          </a:p>
+          <a:p>
+            <a:pPr marL="914400" lvl="1">
+              <a:buFont typeface="+mj-lt"/>
+              <a:buAutoNum type="arabicPeriod"/>
+            </a:pPr>
+            <a:r>
+              <a:rPr lang="ru-RU" sz="2000" b="0" dirty="0">
+                <a:solidFill>
+                  <a:srgbClr val="00BBEE"/>
+                </a:solidFill>
+              </a:rPr>
+              <a:t>Разработано </a:t>
+            </a:r>
+            <a:r>
+              <a:rPr lang="ru-RU" sz="2000" b="0" dirty="0" err="1">
+                <a:solidFill>
+                  <a:srgbClr val="00BBEE"/>
+                </a:solidFill>
+              </a:rPr>
+              <a:t>импортонезависимое</a:t>
+            </a:r>
+            <a:r>
+              <a:rPr lang="ru-RU" sz="2000" b="0" dirty="0">
+                <a:solidFill>
+                  <a:srgbClr val="00BBEE"/>
+                </a:solidFill>
+              </a:rPr>
+              <a:t> приложение</a:t>
+            </a:r>
+          </a:p>
+          <a:p>
+            <a:pPr marL="914400" lvl="1">
+              <a:buFont typeface="+mj-lt"/>
+              <a:buAutoNum type="arabicPeriod"/>
+            </a:pPr>
+            <a:r>
+              <a:rPr lang="ru-RU" sz="2000" b="0" dirty="0">
+                <a:solidFill>
+                  <a:srgbClr val="00BBEE"/>
+                </a:solidFill>
+              </a:rPr>
+              <a:t>Реализована миграция данных из M</a:t>
+            </a:r>
+            <a:r>
+              <a:rPr lang="en-US" sz="2000" dirty="0">
+                <a:solidFill>
+                  <a:srgbClr val="00BBEE"/>
+                </a:solidFill>
+              </a:rPr>
+              <a:t>S </a:t>
+            </a:r>
+            <a:r>
+              <a:rPr lang="ru-RU" sz="2000" b="0" dirty="0">
+                <a:solidFill>
+                  <a:srgbClr val="00BBEE"/>
+                </a:solidFill>
+              </a:rPr>
+              <a:t>SQL в </a:t>
+            </a:r>
+            <a:r>
+              <a:rPr lang="ru-RU" sz="2000" b="0" dirty="0" err="1">
+                <a:solidFill>
+                  <a:srgbClr val="00BBEE"/>
+                </a:solidFill>
+              </a:rPr>
+              <a:t>PostgreSQL</a:t>
+            </a:r>
+            <a:endParaRPr lang="ru-RU" sz="2000" b="0" dirty="0">
+              <a:solidFill>
+                <a:srgbClr val="00BBEE"/>
+              </a:solidFill>
+            </a:endParaRPr>
+          </a:p>
+          <a:p>
+            <a:pPr marL="914400" lvl="1">
+              <a:buFont typeface="+mj-lt"/>
+              <a:buAutoNum type="arabicPeriod"/>
+            </a:pPr>
+            <a:r>
+              <a:rPr lang="ru-RU" sz="2000" b="0" dirty="0">
+                <a:solidFill>
+                  <a:srgbClr val="00BBEE"/>
+                </a:solidFill>
+              </a:rPr>
+              <a:t>Создана нормализованная структура БД</a:t>
+            </a:r>
+          </a:p>
+          <a:p>
+            <a:pPr marL="914400" lvl="1">
+              <a:buFont typeface="+mj-lt"/>
+              <a:buAutoNum type="arabicPeriod"/>
+            </a:pPr>
+            <a:r>
+              <a:rPr lang="ru-RU" sz="2000" b="0" dirty="0">
+                <a:solidFill>
+                  <a:srgbClr val="00BBEE"/>
+                </a:solidFill>
+              </a:rPr>
+              <a:t>Внедрена система аудита действий</a:t>
+            </a:r>
+            <a:endParaRPr lang="en-US" sz="2000" dirty="0">
+              <a:solidFill>
+                <a:srgbClr val="00BBEE"/>
+              </a:solidFill>
+            </a:endParaRPr>
+          </a:p>
+          <a:p>
+            <a:pPr marL="914400" lvl="1">
+              <a:buFont typeface="+mj-lt"/>
+              <a:buAutoNum type="arabicPeriod"/>
+            </a:pPr>
+            <a:r>
+              <a:rPr lang="ru-RU" sz="2000" b="0" dirty="0">
+                <a:solidFill>
+                  <a:srgbClr val="00BBEE"/>
+                </a:solidFill>
+              </a:rPr>
+              <a:t>Обеспечена совместимость с Astra Linux</a:t>
+            </a:r>
+            <a:endParaRPr lang="en-US" sz="2000" dirty="0">
+              <a:solidFill>
+                <a:srgbClr val="00BBEE"/>
+              </a:solidFill>
+            </a:endParaRPr>
+          </a:p>
+          <a:p>
+            <a:pPr marL="914400" lvl="1">
+              <a:buFont typeface="+mj-lt"/>
+              <a:buAutoNum type="arabicPeriod"/>
+            </a:pPr>
+            <a:endParaRPr lang="en-US" sz="2000" b="0" dirty="0">
+              <a:solidFill>
+                <a:srgbClr val="00BBEE"/>
+              </a:solidFill>
+            </a:endParaRPr>
+          </a:p>
+          <a:p>
+            <a:r>
+              <a:rPr lang="ru-RU" sz="2000" dirty="0"/>
+              <a:t>Перспективы</a:t>
+            </a:r>
+            <a:r>
+              <a:rPr lang="en-US" sz="2000" dirty="0"/>
+              <a:t>:</a:t>
+            </a:r>
+            <a:endParaRPr lang="ru-RU" sz="2000" dirty="0"/>
+          </a:p>
+          <a:p>
+            <a:pPr marL="800100" lvl="1" indent="-342900">
+              <a:buFont typeface="+mj-lt"/>
+              <a:buAutoNum type="arabicPeriod"/>
+            </a:pPr>
+            <a:r>
+              <a:rPr lang="ru-RU" sz="2000" dirty="0">
+                <a:solidFill>
+                  <a:srgbClr val="00BBEE"/>
+                </a:solidFill>
+              </a:rPr>
+              <a:t>Добавление модуля «Анализ»</a:t>
+            </a:r>
+          </a:p>
+          <a:p>
+            <a:pPr marL="800100" lvl="1" indent="-342900">
+              <a:buFont typeface="+mj-lt"/>
+              <a:buAutoNum type="arabicPeriod"/>
+            </a:pPr>
+            <a:r>
+              <a:rPr lang="ru-RU" sz="2000" dirty="0">
+                <a:solidFill>
+                  <a:srgbClr val="00BBEE"/>
+                </a:solidFill>
+              </a:rPr>
+              <a:t>Создание отчетности через </a:t>
+            </a:r>
+            <a:r>
+              <a:rPr lang="en-US" sz="2000" dirty="0">
+                <a:solidFill>
+                  <a:srgbClr val="00BBEE"/>
+                </a:solidFill>
+              </a:rPr>
+              <a:t>pdf</a:t>
+            </a:r>
+            <a:endParaRPr lang="ru-RU" sz="2000" dirty="0">
+              <a:solidFill>
+                <a:srgbClr val="00BBEE"/>
+              </a:solidFill>
+            </a:endParaRPr>
+          </a:p>
+          <a:p>
+            <a:r>
+              <a:rPr lang="ru-RU" sz="2000" dirty="0"/>
+              <a:t>	</a:t>
+            </a:r>
+          </a:p>
+          <a:p>
+            <a:pPr lvl="1" indent="0">
+              <a:buNone/>
+            </a:pPr>
+            <a:endParaRPr lang="ru-RU" sz="2000" b="0" dirty="0">
+              <a:solidFill>
+                <a:srgbClr val="00BBEE"/>
+              </a:solidFill>
+            </a:endParaRPr>
+          </a:p>
+          <a:p>
+            <a:br>
+              <a:rPr lang="ru-RU" dirty="0"/>
+            </a:br>
+            <a:endParaRPr lang="ru-RU" dirty="0"/>
+          </a:p>
+        </p:txBody>
+      </p:sp>
+    </p:spTree>
+    <p:extLst>
+      <p:ext uri="{BB962C8B-B14F-4D97-AF65-F5344CB8AC3E}">
+        <p14:creationId xmlns:p14="http://schemas.microsoft.com/office/powerpoint/2010/main" val="3029875070"/>
+      </p:ext>
+    </p:extLst>
+  </p:cSld>
+  <p:clrMapOvr>
+    <a:masterClrMapping/>
+  </p:clrMapOvr>
+</p:sld>
+</file>
+
+<file path=ppt/slides/slide14.xml><?xml version="1.0" encoding="utf-8"?>
 <p:sld xmlns:a="http://schemas.openxmlformats.org/drawingml/2006/main" xmlns:r="http://schemas.openxmlformats.org/officeDocument/2006/relationships" xmlns:p="http://schemas.openxmlformats.org/presentationml/2006/main">
   <p:cSld>
     <p:spTree>
@@ -9052,6 +9804,144 @@
           <p:cNvPr id="2" name="Заголовок 1">
             <a:extLst>
               <a:ext uri="{FF2B5EF4-FFF2-40B4-BE49-F238E27FC236}">
+                <a16:creationId xmlns:a16="http://schemas.microsoft.com/office/drawing/2014/main" id="{F900587E-060E-9CF6-C7F3-173D74929293}"/>
+              </a:ext>
+            </a:extLst>
+          </p:cNvPr>
+          <p:cNvSpPr>
+            <a:spLocks noGrp="1"/>
+          </p:cNvSpPr>
+          <p:nvPr>
+            <p:ph type="title"/>
+          </p:nvPr>
+        </p:nvSpPr>
+        <p:spPr/>
+        <p:txBody>
+          <a:bodyPr/>
+          <a:lstStyle/>
+          <a:p>
+            <a:r>
+              <a:rPr lang="ru-RU" dirty="0"/>
+              <a:t>Схема базы данных</a:t>
+            </a:r>
+          </a:p>
+        </p:txBody>
+      </p:sp>
+      <p:sp>
+        <p:nvSpPr>
+          <p:cNvPr id="3" name="Текст 2">
+            <a:extLst>
+              <a:ext uri="{FF2B5EF4-FFF2-40B4-BE49-F238E27FC236}">
+                <a16:creationId xmlns:a16="http://schemas.microsoft.com/office/drawing/2014/main" id="{2EA0098E-8172-BE77-991C-875A76B1FBD5}"/>
+              </a:ext>
+            </a:extLst>
+          </p:cNvPr>
+          <p:cNvSpPr>
+            <a:spLocks noGrp="1"/>
+          </p:cNvSpPr>
+          <p:nvPr>
+            <p:ph type="body" sz="quarter" idx="10"/>
+          </p:nvPr>
+        </p:nvSpPr>
+        <p:spPr/>
+        <p:txBody>
+          <a:bodyPr/>
+          <a:lstStyle/>
+          <a:p>
+            <a:endParaRPr lang="ru-RU"/>
+          </a:p>
+        </p:txBody>
+      </p:sp>
+      <p:sp>
+        <p:nvSpPr>
+          <p:cNvPr id="4" name="Текст 3">
+            <a:extLst>
+              <a:ext uri="{FF2B5EF4-FFF2-40B4-BE49-F238E27FC236}">
+                <a16:creationId xmlns:a16="http://schemas.microsoft.com/office/drawing/2014/main" id="{97765106-71E2-34CA-A474-C710E52B5A4E}"/>
+              </a:ext>
+            </a:extLst>
+          </p:cNvPr>
+          <p:cNvSpPr>
+            <a:spLocks noGrp="1"/>
+          </p:cNvSpPr>
+          <p:nvPr>
+            <p:ph type="body" sz="quarter" idx="11"/>
+          </p:nvPr>
+        </p:nvSpPr>
+        <p:spPr/>
+        <p:txBody>
+          <a:bodyPr/>
+          <a:lstStyle/>
+          <a:p>
+            <a:endParaRPr lang="ru-RU"/>
+          </a:p>
+        </p:txBody>
+      </p:sp>
+      <p:pic>
+        <p:nvPicPr>
+          <p:cNvPr id="6" name="Рисунок 5">
+            <a:extLst>
+              <a:ext uri="{FF2B5EF4-FFF2-40B4-BE49-F238E27FC236}">
+                <a16:creationId xmlns:a16="http://schemas.microsoft.com/office/drawing/2014/main" id="{01C5B6CE-10BF-7123-51CD-23731B32AD1A}"/>
+              </a:ext>
+            </a:extLst>
+          </p:cNvPr>
+          <p:cNvPicPr>
+            <a:picLocks noChangeAspect="1"/>
+          </p:cNvPicPr>
+          <p:nvPr/>
+        </p:nvPicPr>
+        <p:blipFill>
+          <a:blip r:embed="rId2"/>
+          <a:stretch>
+            <a:fillRect/>
+          </a:stretch>
+        </p:blipFill>
+        <p:spPr>
+          <a:xfrm>
+            <a:off x="2599123" y="2409036"/>
+            <a:ext cx="6447223" cy="3668063"/>
+          </a:xfrm>
+          <a:prstGeom prst="rect">
+            <a:avLst/>
+          </a:prstGeom>
+        </p:spPr>
+      </p:pic>
+    </p:spTree>
+    <p:extLst>
+      <p:ext uri="{BB962C8B-B14F-4D97-AF65-F5344CB8AC3E}">
+        <p14:creationId xmlns:p14="http://schemas.microsoft.com/office/powerpoint/2010/main" val="3926501535"/>
+      </p:ext>
+    </p:extLst>
+  </p:cSld>
+  <p:clrMapOvr>
+    <a:masterClrMapping/>
+  </p:clrMapOvr>
+</p:sld>
+</file>
+
+<file path=ppt/slides/slide8.xml><?xml version="1.0" encoding="utf-8"?>
+<p:sld xmlns:a="http://schemas.openxmlformats.org/drawingml/2006/main" xmlns:r="http://schemas.openxmlformats.org/officeDocument/2006/relationships" xmlns:p="http://schemas.openxmlformats.org/presentationml/2006/main">
+  <p:cSld>
+    <p:spTree>
+      <p:nvGrpSpPr>
+        <p:cNvPr id="1" name=""/>
+        <p:cNvGrpSpPr/>
+        <p:nvPr/>
+      </p:nvGrpSpPr>
+      <p:grpSpPr>
+        <a:xfrm>
+          <a:off x="0" y="0"/>
+          <a:ext cx="0" cy="0"/>
+          <a:chOff x="0" y="0"/>
+          <a:chExt cx="0" cy="0"/>
+        </a:xfrm>
+      </p:grpSpPr>
+      <p:sp>
+        <p:nvSpPr>
+          <p:cNvPr id="2" name="Заголовок 1">
+            <a:extLst>
+              <a:ext uri="{FF2B5EF4-FFF2-40B4-BE49-F238E27FC236}">
                 <a16:creationId xmlns:a16="http://schemas.microsoft.com/office/drawing/2014/main" id="{3EFE940B-02B2-F28C-2F08-182EB8A921A1}"/>
               </a:ext>
             </a:extLst>
@@ -9433,7 +10323,7 @@
 </p:sld>
 </file>
 
-<file path=ppt/slides/slide8.xml><?xml version="1.0" encoding="utf-8"?>
+<file path=ppt/slides/slide9.xml><?xml version="1.0" encoding="utf-8"?>
 <p:sld xmlns:a="http://schemas.openxmlformats.org/drawingml/2006/main" xmlns:r="http://schemas.openxmlformats.org/officeDocument/2006/relationships" xmlns:p="http://schemas.openxmlformats.org/presentationml/2006/main">
   <p:cSld>
     <p:spTree>
@@ -9450,39 +10340,6 @@
           <a:chExt cx="0" cy="0"/>
         </a:xfrm>
       </p:grpSpPr>
-      <p:sp>
-        <p:nvSpPr>
-          <p:cNvPr id="2" name="Заголовок 1">
-            <a:extLst>
-              <a:ext uri="{FF2B5EF4-FFF2-40B4-BE49-F238E27FC236}">
-                <a16:creationId xmlns:a16="http://schemas.microsoft.com/office/drawing/2014/main" id="{D3DBBEF1-2F25-5505-383A-EEF0F128906F}"/>
-              </a:ext>
-            </a:extLst>
-          </p:cNvPr>
-          <p:cNvSpPr>
-            <a:spLocks noGrp="1"/>
-          </p:cNvSpPr>
-          <p:nvPr>
-            <p:ph type="title"/>
-          </p:nvPr>
-        </p:nvSpPr>
-        <p:spPr>
-          <a:xfrm>
-            <a:off x="559574" y="412962"/>
-            <a:ext cx="9173513" cy="415498"/>
-          </a:xfrm>
-        </p:spPr>
-        <p:txBody>
-          <a:bodyPr/>
-          <a:lstStyle/>
-          <a:p>
-            <a:r>
-              <a:rPr lang="ru-RU" dirty="0"/>
-              <a:t>Пользовательский интерфейс</a:t>
-            </a:r>
-          </a:p>
-        </p:txBody>
-      </p:sp>
       <p:pic>
         <p:nvPicPr>
           <p:cNvPr id="6" name="Рисунок 5">
@@ -9505,338 +10362,586 @@
         </p:blipFill>
         <p:spPr>
           <a:xfrm>
-            <a:off x="346510" y="1686757"/>
-            <a:ext cx="4318261" cy="3389866"/>
+            <a:off x="2775892" y="1386668"/>
+            <a:ext cx="6640216" cy="5212618"/>
           </a:xfrm>
           <a:prstGeom prst="rect">
             <a:avLst/>
           </a:prstGeom>
         </p:spPr>
       </p:pic>
-      <p:pic>
-        <p:nvPicPr>
-          <p:cNvPr id="10" name="Рисунок 9">
+      <p:sp>
+        <p:nvSpPr>
+          <p:cNvPr id="2" name="Заголовок 1">
             <a:extLst>
               <a:ext uri="{FF2B5EF4-FFF2-40B4-BE49-F238E27FC236}">
-                <a16:creationId xmlns:a16="http://schemas.microsoft.com/office/drawing/2014/main" id="{AA400AF4-567E-1542-77AA-F0F00A34D3B0}"/>
+                <a16:creationId xmlns:a16="http://schemas.microsoft.com/office/drawing/2014/main" id="{D3DBBEF1-2F25-5505-383A-EEF0F128906F}"/>
               </a:ext>
             </a:extLst>
           </p:cNvPr>
-          <p:cNvPicPr>
-            <a:picLocks noChangeAspect="1"/>
-          </p:cNvPicPr>
+          <p:cNvSpPr>
+            <a:spLocks noGrp="1"/>
+          </p:cNvSpPr>
+          <p:nvPr>
+            <p:ph type="title"/>
+          </p:nvPr>
+        </p:nvSpPr>
+        <p:spPr>
+          <a:xfrm>
+            <a:off x="559574" y="412962"/>
+            <a:ext cx="9173513" cy="415498"/>
+          </a:xfrm>
+        </p:spPr>
+        <p:txBody>
+          <a:bodyPr/>
+          <a:lstStyle/>
+          <a:p>
+            <a:r>
+              <a:rPr lang="ru-RU" dirty="0"/>
+              <a:t>Пользовательский интерфейс</a:t>
+            </a:r>
+            <a:r>
+              <a:rPr lang="en-US" dirty="0"/>
+              <a:t>:</a:t>
+            </a:r>
+            <a:r>
+              <a:rPr lang="ru-RU" dirty="0"/>
+              <a:t> главное меню</a:t>
+            </a:r>
+          </a:p>
+        </p:txBody>
+      </p:sp>
+      <p:sp>
+        <p:nvSpPr>
+          <p:cNvPr id="4" name="Прямоугольник 3">
+            <a:extLst>
+              <a:ext uri="{FF2B5EF4-FFF2-40B4-BE49-F238E27FC236}">
+                <a16:creationId xmlns:a16="http://schemas.microsoft.com/office/drawing/2014/main" id="{0331AAB4-1CB3-0EFD-2F44-592E943F0537}"/>
+              </a:ext>
+            </a:extLst>
+          </p:cNvPr>
+          <p:cNvSpPr/>
           <p:nvPr/>
-        </p:nvPicPr>
-        <p:blipFill>
-          <a:blip r:embed="rId3"/>
-          <a:stretch>
-            <a:fillRect/>
-          </a:stretch>
-        </p:blipFill>
-        <p:spPr>
-          <a:xfrm>
-            <a:off x="5102287" y="1686757"/>
-            <a:ext cx="6743203" cy="3389866"/>
+        </p:nvSpPr>
+        <p:spPr>
+          <a:xfrm>
+            <a:off x="4385569" y="2814220"/>
+            <a:ext cx="3240349" cy="763481"/>
           </a:xfrm>
           <a:prstGeom prst="rect">
             <a:avLst/>
           </a:prstGeom>
-        </p:spPr>
-      </p:pic>
+          <a:noFill/>
+          <a:ln w="28575">
+            <a:solidFill>
+              <a:srgbClr val="FF0000"/>
+            </a:solidFill>
+          </a:ln>
+        </p:spPr>
+        <p:style>
+          <a:lnRef idx="2">
+            <a:schemeClr val="accent1">
+              <a:shade val="15000"/>
+            </a:schemeClr>
+          </a:lnRef>
+          <a:fillRef idx="1">
+            <a:schemeClr val="accent1"/>
+          </a:fillRef>
+          <a:effectRef idx="0">
+            <a:schemeClr val="accent1"/>
+          </a:effectRef>
+          <a:fontRef idx="minor">
+            <a:schemeClr val="lt1"/>
+          </a:fontRef>
+        </p:style>
+        <p:txBody>
+          <a:bodyPr rtlCol="0" anchor="ctr"/>
+          <a:lstStyle/>
+          <a:p>
+            <a:pPr algn="ctr"/>
+            <a:endParaRPr lang="ru-RU"/>
+          </a:p>
+        </p:txBody>
+      </p:sp>
+      <p:cxnSp>
+        <p:nvCxnSpPr>
+          <p:cNvPr id="7" name="Прямая соединительная линия 6">
+            <a:extLst>
+              <a:ext uri="{FF2B5EF4-FFF2-40B4-BE49-F238E27FC236}">
+                <a16:creationId xmlns:a16="http://schemas.microsoft.com/office/drawing/2014/main" id="{B31C2873-9B9A-568E-5075-30A11935F17B}"/>
+              </a:ext>
+            </a:extLst>
+          </p:cNvPr>
+          <p:cNvCxnSpPr>
+            <a:cxnSpLocks/>
+          </p:cNvCxnSpPr>
+          <p:nvPr/>
+        </p:nvCxnSpPr>
+        <p:spPr>
+          <a:xfrm flipV="1">
+            <a:off x="7625918" y="2565647"/>
+            <a:ext cx="346230" cy="248574"/>
+          </a:xfrm>
+          <a:prstGeom prst="line">
+            <a:avLst/>
+          </a:prstGeom>
+          <a:ln w="28575">
+            <a:solidFill>
+              <a:srgbClr val="C00000"/>
+            </a:solidFill>
+          </a:ln>
+        </p:spPr>
+        <p:style>
+          <a:lnRef idx="1">
+            <a:schemeClr val="accent1"/>
+          </a:lnRef>
+          <a:fillRef idx="0">
+            <a:schemeClr val="accent1"/>
+          </a:fillRef>
+          <a:effectRef idx="0">
+            <a:schemeClr val="accent1"/>
+          </a:effectRef>
+          <a:fontRef idx="minor">
+            <a:schemeClr val="tx1"/>
+          </a:fontRef>
+        </p:style>
+      </p:cxnSp>
+      <p:cxnSp>
+        <p:nvCxnSpPr>
+          <p:cNvPr id="11" name="Прямая соединительная линия 10">
+            <a:extLst>
+              <a:ext uri="{FF2B5EF4-FFF2-40B4-BE49-F238E27FC236}">
+                <a16:creationId xmlns:a16="http://schemas.microsoft.com/office/drawing/2014/main" id="{9C4F252F-F59C-9C1E-AF94-88038C798FCB}"/>
+              </a:ext>
+            </a:extLst>
+          </p:cNvPr>
+          <p:cNvCxnSpPr>
+            <a:cxnSpLocks/>
+          </p:cNvCxnSpPr>
+          <p:nvPr/>
+        </p:nvCxnSpPr>
+        <p:spPr>
+          <a:xfrm>
+            <a:off x="7972148" y="2565647"/>
+            <a:ext cx="3311370" cy="0"/>
+          </a:xfrm>
+          <a:prstGeom prst="line">
+            <a:avLst/>
+          </a:prstGeom>
+          <a:ln w="28575">
+            <a:solidFill>
+              <a:srgbClr val="C00000"/>
+            </a:solidFill>
+          </a:ln>
+        </p:spPr>
+        <p:style>
+          <a:lnRef idx="1">
+            <a:schemeClr val="accent1"/>
+          </a:lnRef>
+          <a:fillRef idx="0">
+            <a:schemeClr val="accent1"/>
+          </a:fillRef>
+          <a:effectRef idx="0">
+            <a:schemeClr val="accent1"/>
+          </a:effectRef>
+          <a:fontRef idx="minor">
+            <a:schemeClr val="tx1"/>
+          </a:fontRef>
+        </p:style>
+      </p:cxnSp>
+      <p:sp>
+        <p:nvSpPr>
+          <p:cNvPr id="12" name="TextBox 11">
+            <a:extLst>
+              <a:ext uri="{FF2B5EF4-FFF2-40B4-BE49-F238E27FC236}">
+                <a16:creationId xmlns:a16="http://schemas.microsoft.com/office/drawing/2014/main" id="{A0042055-E895-57CB-22FE-8F920089F24E}"/>
+              </a:ext>
+            </a:extLst>
+          </p:cNvPr>
+          <p:cNvSpPr txBox="1"/>
+          <p:nvPr/>
+        </p:nvSpPr>
+        <p:spPr>
+          <a:xfrm>
+            <a:off x="7972148" y="2260224"/>
+            <a:ext cx="3118161" cy="369332"/>
+          </a:xfrm>
+          <a:prstGeom prst="rect">
+            <a:avLst/>
+          </a:prstGeom>
+          <a:noFill/>
+        </p:spPr>
+        <p:txBody>
+          <a:bodyPr wrap="none" rtlCol="0">
+            <a:spAutoFit/>
+          </a:bodyPr>
+          <a:lstStyle/>
+          <a:p>
+            <a:r>
+              <a:rPr lang="ru-RU" dirty="0">
+                <a:solidFill>
+                  <a:srgbClr val="C00000"/>
+                </a:solidFill>
+              </a:rPr>
+              <a:t>Переход в окно «Документы»</a:t>
+            </a:r>
+          </a:p>
+        </p:txBody>
+      </p:sp>
+      <p:sp>
+        <p:nvSpPr>
+          <p:cNvPr id="15" name="Прямоугольник 14">
+            <a:extLst>
+              <a:ext uri="{FF2B5EF4-FFF2-40B4-BE49-F238E27FC236}">
+                <a16:creationId xmlns:a16="http://schemas.microsoft.com/office/drawing/2014/main" id="{A221DF5A-E042-5D6D-38EC-05EDA03A2939}"/>
+              </a:ext>
+            </a:extLst>
+          </p:cNvPr>
+          <p:cNvSpPr/>
+          <p:nvPr/>
+        </p:nvSpPr>
+        <p:spPr>
+          <a:xfrm>
+            <a:off x="4385569" y="3648722"/>
+            <a:ext cx="3240349" cy="275208"/>
+          </a:xfrm>
+          <a:prstGeom prst="rect">
+            <a:avLst/>
+          </a:prstGeom>
+          <a:noFill/>
+          <a:ln w="28575">
+            <a:solidFill>
+              <a:schemeClr val="accent6"/>
+            </a:solidFill>
+          </a:ln>
+        </p:spPr>
+        <p:style>
+          <a:lnRef idx="2">
+            <a:schemeClr val="accent1">
+              <a:shade val="15000"/>
+            </a:schemeClr>
+          </a:lnRef>
+          <a:fillRef idx="1">
+            <a:schemeClr val="accent1"/>
+          </a:fillRef>
+          <a:effectRef idx="0">
+            <a:schemeClr val="accent1"/>
+          </a:effectRef>
+          <a:fontRef idx="minor">
+            <a:schemeClr val="lt1"/>
+          </a:fontRef>
+        </p:style>
+        <p:txBody>
+          <a:bodyPr rtlCol="0" anchor="ctr"/>
+          <a:lstStyle/>
+          <a:p>
+            <a:pPr algn="ctr"/>
+            <a:endParaRPr lang="ru-RU"/>
+          </a:p>
+        </p:txBody>
+      </p:sp>
+      <p:cxnSp>
+        <p:nvCxnSpPr>
+          <p:cNvPr id="17" name="Прямая соединительная линия 16">
+            <a:extLst>
+              <a:ext uri="{FF2B5EF4-FFF2-40B4-BE49-F238E27FC236}">
+                <a16:creationId xmlns:a16="http://schemas.microsoft.com/office/drawing/2014/main" id="{861B4DA4-B0EC-2F43-B26C-686934412BBB}"/>
+              </a:ext>
+            </a:extLst>
+          </p:cNvPr>
+          <p:cNvCxnSpPr/>
+          <p:nvPr/>
+        </p:nvCxnSpPr>
+        <p:spPr>
+          <a:xfrm flipH="1" flipV="1">
+            <a:off x="3977196" y="3355759"/>
+            <a:ext cx="408373" cy="292963"/>
+          </a:xfrm>
+          <a:prstGeom prst="line">
+            <a:avLst/>
+          </a:prstGeom>
+          <a:ln w="28575">
+            <a:solidFill>
+              <a:schemeClr val="accent6"/>
+            </a:solidFill>
+          </a:ln>
+        </p:spPr>
+        <p:style>
+          <a:lnRef idx="1">
+            <a:schemeClr val="accent1"/>
+          </a:lnRef>
+          <a:fillRef idx="0">
+            <a:schemeClr val="accent1"/>
+          </a:fillRef>
+          <a:effectRef idx="0">
+            <a:schemeClr val="accent1"/>
+          </a:effectRef>
+          <a:fontRef idx="minor">
+            <a:schemeClr val="tx1"/>
+          </a:fontRef>
+        </p:style>
+      </p:cxnSp>
+      <p:cxnSp>
+        <p:nvCxnSpPr>
+          <p:cNvPr id="22" name="Прямая соединительная линия 21">
+            <a:extLst>
+              <a:ext uri="{FF2B5EF4-FFF2-40B4-BE49-F238E27FC236}">
+                <a16:creationId xmlns:a16="http://schemas.microsoft.com/office/drawing/2014/main" id="{350A0694-631C-48FC-CA49-4C3D538869CA}"/>
+              </a:ext>
+            </a:extLst>
+          </p:cNvPr>
+          <p:cNvCxnSpPr>
+            <a:cxnSpLocks/>
+          </p:cNvCxnSpPr>
+          <p:nvPr/>
+        </p:nvCxnSpPr>
+        <p:spPr>
+          <a:xfrm flipH="1">
+            <a:off x="754602" y="3355759"/>
+            <a:ext cx="3222594" cy="0"/>
+          </a:xfrm>
+          <a:prstGeom prst="line">
+            <a:avLst/>
+          </a:prstGeom>
+          <a:ln w="28575">
+            <a:solidFill>
+              <a:schemeClr val="accent6"/>
+            </a:solidFill>
+          </a:ln>
+        </p:spPr>
+        <p:style>
+          <a:lnRef idx="1">
+            <a:schemeClr val="accent1"/>
+          </a:lnRef>
+          <a:fillRef idx="0">
+            <a:schemeClr val="accent1"/>
+          </a:fillRef>
+          <a:effectRef idx="0">
+            <a:schemeClr val="accent1"/>
+          </a:effectRef>
+          <a:fontRef idx="minor">
+            <a:schemeClr val="tx1"/>
+          </a:fontRef>
+        </p:style>
+      </p:cxnSp>
+      <p:sp>
+        <p:nvSpPr>
+          <p:cNvPr id="23" name="TextBox 22">
+            <a:extLst>
+              <a:ext uri="{FF2B5EF4-FFF2-40B4-BE49-F238E27FC236}">
+                <a16:creationId xmlns:a16="http://schemas.microsoft.com/office/drawing/2014/main" id="{62DDADE7-4D29-6DA4-901F-6ED0ADB320A8}"/>
+              </a:ext>
+            </a:extLst>
+          </p:cNvPr>
+          <p:cNvSpPr txBox="1"/>
+          <p:nvPr/>
+        </p:nvSpPr>
+        <p:spPr>
+          <a:xfrm>
+            <a:off x="656900" y="3011294"/>
+            <a:ext cx="3116109" cy="369332"/>
+          </a:xfrm>
+          <a:prstGeom prst="rect">
+            <a:avLst/>
+          </a:prstGeom>
+          <a:noFill/>
+        </p:spPr>
+        <p:txBody>
+          <a:bodyPr wrap="none" rtlCol="0">
+            <a:spAutoFit/>
+          </a:bodyPr>
+          <a:lstStyle/>
+          <a:p>
+            <a:r>
+              <a:rPr lang="ru-RU" dirty="0">
+                <a:solidFill>
+                  <a:schemeClr val="accent6"/>
+                </a:solidFill>
+              </a:rPr>
+              <a:t>Переход в окно «Извещения»</a:t>
+            </a:r>
+          </a:p>
+        </p:txBody>
+      </p:sp>
+      <p:sp>
+        <p:nvSpPr>
+          <p:cNvPr id="26" name="Прямоугольник 25">
+            <a:extLst>
+              <a:ext uri="{FF2B5EF4-FFF2-40B4-BE49-F238E27FC236}">
+                <a16:creationId xmlns:a16="http://schemas.microsoft.com/office/drawing/2014/main" id="{8522DC30-CA89-BAD8-3483-B199AFFE2C68}"/>
+              </a:ext>
+            </a:extLst>
+          </p:cNvPr>
+          <p:cNvSpPr/>
+          <p:nvPr/>
+        </p:nvSpPr>
+        <p:spPr>
+          <a:xfrm>
+            <a:off x="4385569" y="4014295"/>
+            <a:ext cx="3240349" cy="275208"/>
+          </a:xfrm>
+          <a:prstGeom prst="rect">
+            <a:avLst/>
+          </a:prstGeom>
+          <a:noFill/>
+          <a:ln w="28575">
+            <a:solidFill>
+              <a:schemeClr val="accent4"/>
+            </a:solidFill>
+          </a:ln>
+        </p:spPr>
+        <p:style>
+          <a:lnRef idx="2">
+            <a:schemeClr val="accent1">
+              <a:shade val="15000"/>
+            </a:schemeClr>
+          </a:lnRef>
+          <a:fillRef idx="1">
+            <a:schemeClr val="accent1"/>
+          </a:fillRef>
+          <a:effectRef idx="0">
+            <a:schemeClr val="accent1"/>
+          </a:effectRef>
+          <a:fontRef idx="minor">
+            <a:schemeClr val="lt1"/>
+          </a:fontRef>
+        </p:style>
+        <p:txBody>
+          <a:bodyPr rtlCol="0" anchor="ctr"/>
+          <a:lstStyle/>
+          <a:p>
+            <a:pPr algn="ctr"/>
+            <a:endParaRPr lang="ru-RU"/>
+          </a:p>
+        </p:txBody>
+      </p:sp>
+      <p:cxnSp>
+        <p:nvCxnSpPr>
+          <p:cNvPr id="28" name="Прямая соединительная линия 27">
+            <a:extLst>
+              <a:ext uri="{FF2B5EF4-FFF2-40B4-BE49-F238E27FC236}">
+                <a16:creationId xmlns:a16="http://schemas.microsoft.com/office/drawing/2014/main" id="{6AAEE8A6-2268-8D75-E444-BB1E29C12B56}"/>
+              </a:ext>
+            </a:extLst>
+          </p:cNvPr>
+          <p:cNvCxnSpPr/>
+          <p:nvPr/>
+        </p:nvCxnSpPr>
+        <p:spPr>
+          <a:xfrm>
+            <a:off x="7625918" y="4289503"/>
+            <a:ext cx="346230" cy="264742"/>
+          </a:xfrm>
+          <a:prstGeom prst="line">
+            <a:avLst/>
+          </a:prstGeom>
+          <a:ln w="28575">
+            <a:solidFill>
+              <a:schemeClr val="accent4"/>
+            </a:solidFill>
+          </a:ln>
+        </p:spPr>
+        <p:style>
+          <a:lnRef idx="1">
+            <a:schemeClr val="accent1"/>
+          </a:lnRef>
+          <a:fillRef idx="0">
+            <a:schemeClr val="accent1"/>
+          </a:fillRef>
+          <a:effectRef idx="0">
+            <a:schemeClr val="accent1"/>
+          </a:effectRef>
+          <a:fontRef idx="minor">
+            <a:schemeClr val="tx1"/>
+          </a:fontRef>
+        </p:style>
+      </p:cxnSp>
+      <p:cxnSp>
+        <p:nvCxnSpPr>
+          <p:cNvPr id="30" name="Прямая соединительная линия 29">
+            <a:extLst>
+              <a:ext uri="{FF2B5EF4-FFF2-40B4-BE49-F238E27FC236}">
+                <a16:creationId xmlns:a16="http://schemas.microsoft.com/office/drawing/2014/main" id="{E6F13AA1-11B9-0B9B-F03E-A6CBDC9358BF}"/>
+              </a:ext>
+            </a:extLst>
+          </p:cNvPr>
+          <p:cNvCxnSpPr>
+            <a:cxnSpLocks/>
+          </p:cNvCxnSpPr>
+          <p:nvPr/>
+        </p:nvCxnSpPr>
+        <p:spPr>
+          <a:xfrm>
+            <a:off x="7972148" y="4554245"/>
+            <a:ext cx="3382392" cy="0"/>
+          </a:xfrm>
+          <a:prstGeom prst="line">
+            <a:avLst/>
+          </a:prstGeom>
+          <a:ln w="28575">
+            <a:solidFill>
+              <a:schemeClr val="accent4"/>
+            </a:solidFill>
+          </a:ln>
+        </p:spPr>
+        <p:style>
+          <a:lnRef idx="1">
+            <a:schemeClr val="accent1"/>
+          </a:lnRef>
+          <a:fillRef idx="0">
+            <a:schemeClr val="accent1"/>
+          </a:fillRef>
+          <a:effectRef idx="0">
+            <a:schemeClr val="accent1"/>
+          </a:effectRef>
+          <a:fontRef idx="minor">
+            <a:schemeClr val="tx1"/>
+          </a:fontRef>
+        </p:style>
+      </p:cxnSp>
+      <p:sp>
+        <p:nvSpPr>
+          <p:cNvPr id="32" name="TextBox 31">
+            <a:extLst>
+              <a:ext uri="{FF2B5EF4-FFF2-40B4-BE49-F238E27FC236}">
+                <a16:creationId xmlns:a16="http://schemas.microsoft.com/office/drawing/2014/main" id="{1BAF7544-A1D0-E9E5-B42E-DCFA1DFF1D65}"/>
+              </a:ext>
+            </a:extLst>
+          </p:cNvPr>
+          <p:cNvSpPr txBox="1"/>
+          <p:nvPr/>
+        </p:nvSpPr>
+        <p:spPr>
+          <a:xfrm>
+            <a:off x="8120938" y="4197082"/>
+            <a:ext cx="2820580" cy="369332"/>
+          </a:xfrm>
+          <a:prstGeom prst="rect">
+            <a:avLst/>
+          </a:prstGeom>
+          <a:noFill/>
+        </p:spPr>
+        <p:txBody>
+          <a:bodyPr wrap="none" rtlCol="0">
+            <a:spAutoFit/>
+          </a:bodyPr>
+          <a:lstStyle/>
+          <a:p>
+            <a:r>
+              <a:rPr lang="ru-RU" dirty="0">
+                <a:solidFill>
+                  <a:schemeClr val="accent4"/>
+                </a:solidFill>
+              </a:rPr>
+              <a:t>Переход в окно «Деталей»</a:t>
+            </a:r>
+          </a:p>
+        </p:txBody>
+      </p:sp>
     </p:spTree>
     <p:extLst>
       <p:ext uri="{BB962C8B-B14F-4D97-AF65-F5344CB8AC3E}">
         <p14:creationId xmlns:p14="http://schemas.microsoft.com/office/powerpoint/2010/main" val="2015755231"/>
-      </p:ext>
-    </p:extLst>
-  </p:cSld>
-  <p:clrMapOvr>
-    <a:masterClrMapping/>
-  </p:clrMapOvr>
-</p:sld>
-</file>
-
-<file path=ppt/slides/slide9.xml><?xml version="1.0" encoding="utf-8"?>
-<p:sld xmlns:a="http://schemas.openxmlformats.org/drawingml/2006/main" xmlns:r="http://schemas.openxmlformats.org/officeDocument/2006/relationships" xmlns:p="http://schemas.openxmlformats.org/presentationml/2006/main">
-  <p:cSld>
-    <p:spTree>
-      <p:nvGrpSpPr>
-        <p:cNvPr id="1" name=""/>
-        <p:cNvGrpSpPr/>
-        <p:nvPr/>
-      </p:nvGrpSpPr>
-      <p:grpSpPr>
-        <a:xfrm>
-          <a:off x="0" y="0"/>
-          <a:ext cx="0" cy="0"/>
-          <a:chOff x="0" y="0"/>
-          <a:chExt cx="0" cy="0"/>
-        </a:xfrm>
-      </p:grpSpPr>
-      <p:sp>
-        <p:nvSpPr>
-          <p:cNvPr id="2" name="Заголовок 1">
-            <a:extLst>
-              <a:ext uri="{FF2B5EF4-FFF2-40B4-BE49-F238E27FC236}">
-                <a16:creationId xmlns:a16="http://schemas.microsoft.com/office/drawing/2014/main" id="{EEF8EAAE-71C6-352A-F486-42173F10E51C}"/>
-              </a:ext>
-            </a:extLst>
-          </p:cNvPr>
-          <p:cNvSpPr>
-            <a:spLocks noGrp="1"/>
-          </p:cNvSpPr>
-          <p:nvPr>
-            <p:ph type="title"/>
-          </p:nvPr>
-        </p:nvSpPr>
-        <p:spPr>
-          <a:xfrm>
-            <a:off x="559574" y="251379"/>
-            <a:ext cx="9173513" cy="738664"/>
-          </a:xfrm>
-        </p:spPr>
-        <p:txBody>
-          <a:bodyPr/>
-          <a:lstStyle/>
-          <a:p>
-            <a:r>
-              <a:rPr lang="ru-RU" dirty="0"/>
-              <a:t>Результаты и выводы</a:t>
-            </a:r>
-            <a:br>
-              <a:rPr lang="ru-RU" dirty="0"/>
-            </a:br>
-            <a:endParaRPr lang="ru-RU" dirty="0"/>
-          </a:p>
-        </p:txBody>
-      </p:sp>
-      <p:sp>
-        <p:nvSpPr>
-          <p:cNvPr id="3" name="Текст 2">
-            <a:extLst>
-              <a:ext uri="{FF2B5EF4-FFF2-40B4-BE49-F238E27FC236}">
-                <a16:creationId xmlns:a16="http://schemas.microsoft.com/office/drawing/2014/main" id="{5A7B9793-DA87-8E17-D127-62B1E17C47B5}"/>
-              </a:ext>
-            </a:extLst>
-          </p:cNvPr>
-          <p:cNvSpPr>
-            <a:spLocks noGrp="1"/>
-          </p:cNvSpPr>
-          <p:nvPr>
-            <p:ph type="body" sz="quarter" idx="10"/>
-          </p:nvPr>
-        </p:nvSpPr>
-        <p:spPr>
-          <a:xfrm>
-            <a:off x="559574" y="1729295"/>
-            <a:ext cx="9063820" cy="4769159"/>
-          </a:xfrm>
-        </p:spPr>
-        <p:txBody>
-          <a:bodyPr/>
-          <a:lstStyle/>
-          <a:p>
-            <a:r>
-              <a:rPr lang="ru-RU" sz="2000" dirty="0"/>
-              <a:t>Результаты работы:</a:t>
-            </a:r>
-          </a:p>
-          <a:p>
-            <a:pPr marL="914400" lvl="1">
-              <a:buFont typeface="+mj-lt"/>
-              <a:buAutoNum type="arabicPeriod"/>
-            </a:pPr>
-            <a:r>
-              <a:rPr lang="ru-RU" sz="2000" b="0" dirty="0">
-                <a:solidFill>
-                  <a:srgbClr val="00BBEE"/>
-                </a:solidFill>
-              </a:rPr>
-              <a:t>Разработано </a:t>
-            </a:r>
-            <a:r>
-              <a:rPr lang="ru-RU" sz="2000" b="0" dirty="0" err="1">
-                <a:solidFill>
-                  <a:srgbClr val="00BBEE"/>
-                </a:solidFill>
-              </a:rPr>
-              <a:t>импортонезависимое</a:t>
-            </a:r>
-            <a:r>
-              <a:rPr lang="ru-RU" sz="2000" b="0" dirty="0">
-                <a:solidFill>
-                  <a:srgbClr val="00BBEE"/>
-                </a:solidFill>
-              </a:rPr>
-              <a:t> приложение</a:t>
-            </a:r>
-          </a:p>
-          <a:p>
-            <a:pPr marL="914400" lvl="1">
-              <a:buFont typeface="+mj-lt"/>
-              <a:buAutoNum type="arabicPeriod"/>
-            </a:pPr>
-            <a:r>
-              <a:rPr lang="ru-RU" sz="2000" b="0" dirty="0">
-                <a:solidFill>
-                  <a:srgbClr val="00BBEE"/>
-                </a:solidFill>
-              </a:rPr>
-              <a:t>Реализована миграция данных из MySQL в </a:t>
-            </a:r>
-            <a:r>
-              <a:rPr lang="ru-RU" sz="2000" b="0" dirty="0" err="1">
-                <a:solidFill>
-                  <a:srgbClr val="00BBEE"/>
-                </a:solidFill>
-              </a:rPr>
-              <a:t>PostgreSQL</a:t>
-            </a:r>
-            <a:endParaRPr lang="ru-RU" sz="2000" b="0" dirty="0">
-              <a:solidFill>
-                <a:srgbClr val="00BBEE"/>
-              </a:solidFill>
-            </a:endParaRPr>
-          </a:p>
-          <a:p>
-            <a:pPr marL="914400" lvl="1">
-              <a:buFont typeface="+mj-lt"/>
-              <a:buAutoNum type="arabicPeriod"/>
-            </a:pPr>
-            <a:r>
-              <a:rPr lang="ru-RU" sz="2000" b="0" dirty="0">
-                <a:solidFill>
-                  <a:srgbClr val="00BBEE"/>
-                </a:solidFill>
-              </a:rPr>
-              <a:t>Создана нормализованная структура БД</a:t>
-            </a:r>
-          </a:p>
-          <a:p>
-            <a:pPr marL="914400" lvl="1">
-              <a:buFont typeface="+mj-lt"/>
-              <a:buAutoNum type="arabicPeriod"/>
-            </a:pPr>
-            <a:r>
-              <a:rPr lang="ru-RU" sz="2000" b="0" dirty="0">
-                <a:solidFill>
-                  <a:srgbClr val="00BBEE"/>
-                </a:solidFill>
-              </a:rPr>
-              <a:t>Внедрена система аудита действий</a:t>
-            </a:r>
-            <a:br>
-              <a:rPr lang="ru-RU" sz="2000" b="0" dirty="0">
-                <a:solidFill>
-                  <a:srgbClr val="00BBEE"/>
-                </a:solidFill>
-              </a:rPr>
-            </a:br>
-            <a:r>
-              <a:rPr lang="ru-RU" sz="2000" b="0" dirty="0">
-                <a:solidFill>
-                  <a:srgbClr val="00BBEE"/>
-                </a:solidFill>
-              </a:rPr>
-              <a:t>Обеспечена совместимость с Astra Linux</a:t>
-            </a:r>
-            <a:endParaRPr lang="en-US" sz="2000" dirty="0">
-              <a:solidFill>
-                <a:srgbClr val="00BBEE"/>
-              </a:solidFill>
-            </a:endParaRPr>
-          </a:p>
-          <a:p>
-            <a:pPr marL="914400" lvl="1">
-              <a:buFont typeface="+mj-lt"/>
-              <a:buAutoNum type="arabicPeriod"/>
-            </a:pPr>
-            <a:endParaRPr lang="en-US" sz="2000" b="0" dirty="0">
-              <a:solidFill>
-                <a:srgbClr val="00BBEE"/>
-              </a:solidFill>
-            </a:endParaRPr>
-          </a:p>
-          <a:p>
-            <a:r>
-              <a:rPr lang="ru-RU" sz="2000" dirty="0"/>
-              <a:t>Перспективы</a:t>
-            </a:r>
-            <a:r>
-              <a:rPr lang="en-US" sz="2000" dirty="0"/>
-              <a:t>:</a:t>
-            </a:r>
-            <a:endParaRPr lang="ru-RU" sz="2000" dirty="0"/>
-          </a:p>
-          <a:p>
-            <a:pPr marL="800100" lvl="1" indent="-342900">
-              <a:buFont typeface="+mj-lt"/>
-              <a:buAutoNum type="arabicPeriod"/>
-            </a:pPr>
-            <a:r>
-              <a:rPr lang="ru-RU" sz="2000" dirty="0">
-                <a:solidFill>
-                  <a:srgbClr val="00BBEE"/>
-                </a:solidFill>
-              </a:rPr>
-              <a:t>Добавление модуля «Анализ»</a:t>
-            </a:r>
-          </a:p>
-          <a:p>
-            <a:pPr marL="800100" lvl="1" indent="-342900">
-              <a:buFont typeface="+mj-lt"/>
-              <a:buAutoNum type="arabicPeriod"/>
-            </a:pPr>
-            <a:r>
-              <a:rPr lang="ru-RU" sz="2000" dirty="0">
-                <a:solidFill>
-                  <a:srgbClr val="00BBEE"/>
-                </a:solidFill>
-              </a:rPr>
-              <a:t>Создание отчетности через </a:t>
-            </a:r>
-            <a:r>
-              <a:rPr lang="en-US" sz="2000" dirty="0">
-                <a:solidFill>
-                  <a:srgbClr val="00BBEE"/>
-                </a:solidFill>
-              </a:rPr>
-              <a:t>pdf</a:t>
-            </a:r>
-            <a:endParaRPr lang="ru-RU" sz="2000" dirty="0">
-              <a:solidFill>
-                <a:srgbClr val="00BBEE"/>
-              </a:solidFill>
-            </a:endParaRPr>
-          </a:p>
-          <a:p>
-            <a:r>
-              <a:rPr lang="ru-RU" sz="2000" dirty="0"/>
-              <a:t>	</a:t>
-            </a:r>
-          </a:p>
-          <a:p>
-            <a:pPr lvl="1" indent="0">
-              <a:buNone/>
-            </a:pPr>
-            <a:endParaRPr lang="ru-RU" sz="2000" b="0" dirty="0">
-              <a:solidFill>
-                <a:srgbClr val="00BBEE"/>
-              </a:solidFill>
-            </a:endParaRPr>
-          </a:p>
-          <a:p>
-            <a:br>
-              <a:rPr lang="ru-RU" dirty="0"/>
-            </a:br>
-            <a:endParaRPr lang="ru-RU" dirty="0"/>
-          </a:p>
-        </p:txBody>
-      </p:sp>
-    </p:spTree>
-    <p:extLst>
-      <p:ext uri="{BB962C8B-B14F-4D97-AF65-F5344CB8AC3E}">
-        <p14:creationId xmlns:p14="http://schemas.microsoft.com/office/powerpoint/2010/main" val="3029875070"/>
       </p:ext>
     </p:extLst>
   </p:cSld>
